--- a/dist/초6/영어/말하기와쓰기/초6_영어_말하기와쓰기_02_비교하기_학생용.pptx
+++ b/dist/초6/영어/말하기와쓰기/초6_영어_말하기와쓰기_02_비교하기_학생용.pptx
@@ -120,13 +120,13 @@
   <p:extLst>
     <p:ext uri="{521415D9-36F7-43E2-AB2F-B90AF26B5E84}">
       <p14:sectionLst xmlns:p14="http://schemas.microsoft.com/office/powerpoint/2010/main">
-        <p14:section name="도입" id="{d0c52d35-d82e-44f2-0b29-96e4ce103c11}">
+        <p14:section name="도입" id="{dfe3e0d4-fd2a-de66-6217-6ebe049bb8ae}">
           <p14:sldIdLst>
             <p14:sldId id="256"/>
             <p14:sldId id="257"/>
           </p14:sldIdLst>
         </p14:section>
-        <p14:section name="개념" id="{5faec4c4-2500-cd8d-2704-d28b8e76f62d}">
+        <p14:section name="개념" id="{f32e0175-ae1d-c7cd-32b8-fb2be662f10f}">
           <p14:sldIdLst>
             <p14:sldId id="258"/>
             <p14:sldId id="259"/>
@@ -134,7 +134,7 @@
             <p14:sldId id="261"/>
           </p14:sldIdLst>
         </p14:section>
-        <p14:section name="연습" id="{be713ab8-a76a-28c7-a9fa-e67d970227b1}">
+        <p14:section name="연습" id="{3cf6361f-d61b-c26c-e643-c0ff7c13292d}">
           <p14:sldIdLst>
             <p14:sldId id="262"/>
             <p14:sldId id="263"/>
@@ -142,18 +142,18 @@
             <p14:sldId id="265"/>
           </p14:sldIdLst>
         </p14:section>
-        <p14:section name="확인" id="{df804810-3802-cdc6-2a25-dc03e3be578f}">
+        <p14:section name="확인" id="{0693812d-607b-c117-3a6f-34c6135ddfbb}">
           <p14:sldIdLst>
             <p14:sldId id="266"/>
             <p14:sldId id="267"/>
           </p14:sldIdLst>
         </p14:section>
-        <p14:section name="정리" id="{e194f98d-6d7f-d6ff-8c1c-3bcfcbb31282}">
+        <p14:section name="정리" id="{c8e318e7-f45d-5809-df0f-02515073ba07}">
           <p14:sldIdLst>
             <p14:sldId id="268"/>
           </p14:sldIdLst>
         </p14:section>
-        <p14:section name="보충" id="{eef85ee2-c4a1-4a20-02eb-efe90d35a28d}">
+        <p14:section name="보충" id="{96be3b14-beb1-980f-c3d9-4f1d69560147}">
           <p14:sldIdLst>
             <p14:sldId id="269"/>
           </p14:sldIdLst>

--- a/dist/초6/영어/말하기와쓰기/초6_영어_말하기와쓰기_02_비교하기_학생용.pptx
+++ b/dist/초6/영어/말하기와쓰기/초6_영어_말하기와쓰기_02_비교하기_학생용.pptx
@@ -120,13 +120,13 @@
   <p:extLst>
     <p:ext uri="{521415D9-36F7-43E2-AB2F-B90AF26B5E84}">
       <p14:sectionLst xmlns:p14="http://schemas.microsoft.com/office/powerpoint/2010/main">
-        <p14:section name="도입" id="{dfe3e0d4-fd2a-de66-6217-6ebe049bb8ae}">
+        <p14:section name="도입" id="{6b0a8d1d-374d-072a-bfe0-611fe3284f54}">
           <p14:sldIdLst>
             <p14:sldId id="256"/>
             <p14:sldId id="257"/>
           </p14:sldIdLst>
         </p14:section>
-        <p14:section name="개념" id="{f32e0175-ae1d-c7cd-32b8-fb2be662f10f}">
+        <p14:section name="개념" id="{8cacac1b-e323-e874-9fae-605d7859f636}">
           <p14:sldIdLst>
             <p14:sldId id="258"/>
             <p14:sldId id="259"/>
@@ -134,7 +134,7 @@
             <p14:sldId id="261"/>
           </p14:sldIdLst>
         </p14:section>
-        <p14:section name="연습" id="{3cf6361f-d61b-c26c-e643-c0ff7c13292d}">
+        <p14:section name="연습" id="{f4b6d18b-82cd-7407-4d27-9f0460931b69}">
           <p14:sldIdLst>
             <p14:sldId id="262"/>
             <p14:sldId id="263"/>
@@ -142,18 +142,18 @@
             <p14:sldId id="265"/>
           </p14:sldIdLst>
         </p14:section>
-        <p14:section name="확인" id="{0693812d-607b-c117-3a6f-34c6135ddfbb}">
+        <p14:section name="확인" id="{eedd2a68-5fe7-3f82-7c73-7d10cc65ee76}">
           <p14:sldIdLst>
             <p14:sldId id="266"/>
             <p14:sldId id="267"/>
           </p14:sldIdLst>
         </p14:section>
-        <p14:section name="정리" id="{c8e318e7-f45d-5809-df0f-02515073ba07}">
+        <p14:section name="정리" id="{7b5b2529-ed9a-b524-c41e-3357eb398ef1}">
           <p14:sldIdLst>
             <p14:sldId id="268"/>
           </p14:sldIdLst>
         </p14:section>
-        <p14:section name="보충" id="{96be3b14-beb1-980f-c3d9-4f1d69560147}">
+        <p14:section name="보충" id="{017ed3e6-9a1d-8c5e-bdb4-9f70334383c6}">
           <p14:sldIdLst>
             <p14:sldId id="269"/>
           </p14:sldIdLst>
